--- a/Magyarország népessége 2025.pptx
+++ b/Magyarország népessége 2025.pptx
@@ -9,6 +9,7 @@
     <p:sldId id="257" r:id="rId3"/>
     <p:sldId id="258" r:id="rId4"/>
     <p:sldId id="259" r:id="rId5"/>
+    <p:sldId id="260" r:id="rId6"/>
   </p:sldIdLst>
   <p:sldSz cx="12192000" cy="6858000"/>
   <p:notesSz cx="6858000" cy="9144000"/>
@@ -107,6 +108,11 @@
       </a:defRPr>
     </a:lvl9pPr>
   </p:defaultTextStyle>
+  <p:extLst>
+    <p:ext uri="{EFAFB233-063F-42B5-8137-9DF3F51BA10A}">
+      <p15:sldGuideLst xmlns:p15="http://schemas.microsoft.com/office/powerpoint/2012/main"/>
+    </p:ext>
+  </p:extLst>
 </p:presentation>
 </file>
 
@@ -257,7 +263,7 @@
           <a:p>
             <a:fld id="{DAA78FAB-1EC3-40C8-ADD3-266788085FA0}" type="datetimeFigureOut">
               <a:rPr lang="hu-HU" smtClean="0"/>
-              <a:t>2026. 09. 15.</a:t>
+              <a:t>2026. 09. 18.</a:t>
             </a:fld>
             <a:endParaRPr lang="hu-HU"/>
           </a:p>
@@ -455,7 +461,7 @@
           <a:p>
             <a:fld id="{DAA78FAB-1EC3-40C8-ADD3-266788085FA0}" type="datetimeFigureOut">
               <a:rPr lang="hu-HU" smtClean="0"/>
-              <a:t>2026. 09. 15.</a:t>
+              <a:t>2026. 09. 18.</a:t>
             </a:fld>
             <a:endParaRPr lang="hu-HU"/>
           </a:p>
@@ -663,7 +669,7 @@
           <a:p>
             <a:fld id="{DAA78FAB-1EC3-40C8-ADD3-266788085FA0}" type="datetimeFigureOut">
               <a:rPr lang="hu-HU" smtClean="0"/>
-              <a:t>2026. 09. 15.</a:t>
+              <a:t>2026. 09. 18.</a:t>
             </a:fld>
             <a:endParaRPr lang="hu-HU"/>
           </a:p>
@@ -861,7 +867,7 @@
           <a:p>
             <a:fld id="{DAA78FAB-1EC3-40C8-ADD3-266788085FA0}" type="datetimeFigureOut">
               <a:rPr lang="hu-HU" smtClean="0"/>
-              <a:t>2026. 09. 15.</a:t>
+              <a:t>2026. 09. 18.</a:t>
             </a:fld>
             <a:endParaRPr lang="hu-HU"/>
           </a:p>
@@ -1136,7 +1142,7 @@
           <a:p>
             <a:fld id="{DAA78FAB-1EC3-40C8-ADD3-266788085FA0}" type="datetimeFigureOut">
               <a:rPr lang="hu-HU" smtClean="0"/>
-              <a:t>2026. 09. 15.</a:t>
+              <a:t>2026. 09. 18.</a:t>
             </a:fld>
             <a:endParaRPr lang="hu-HU"/>
           </a:p>
@@ -1401,7 +1407,7 @@
           <a:p>
             <a:fld id="{DAA78FAB-1EC3-40C8-ADD3-266788085FA0}" type="datetimeFigureOut">
               <a:rPr lang="hu-HU" smtClean="0"/>
-              <a:t>2026. 09. 15.</a:t>
+              <a:t>2026. 09. 18.</a:t>
             </a:fld>
             <a:endParaRPr lang="hu-HU"/>
           </a:p>
@@ -1813,7 +1819,7 @@
           <a:p>
             <a:fld id="{DAA78FAB-1EC3-40C8-ADD3-266788085FA0}" type="datetimeFigureOut">
               <a:rPr lang="hu-HU" smtClean="0"/>
-              <a:t>2026. 09. 15.</a:t>
+              <a:t>2026. 09. 18.</a:t>
             </a:fld>
             <a:endParaRPr lang="hu-HU"/>
           </a:p>
@@ -1954,7 +1960,7 @@
           <a:p>
             <a:fld id="{DAA78FAB-1EC3-40C8-ADD3-266788085FA0}" type="datetimeFigureOut">
               <a:rPr lang="hu-HU" smtClean="0"/>
-              <a:t>2026. 09. 15.</a:t>
+              <a:t>2026. 09. 18.</a:t>
             </a:fld>
             <a:endParaRPr lang="hu-HU"/>
           </a:p>
@@ -2067,7 +2073,7 @@
           <a:p>
             <a:fld id="{DAA78FAB-1EC3-40C8-ADD3-266788085FA0}" type="datetimeFigureOut">
               <a:rPr lang="hu-HU" smtClean="0"/>
-              <a:t>2026. 09. 15.</a:t>
+              <a:t>2026. 09. 18.</a:t>
             </a:fld>
             <a:endParaRPr lang="hu-HU"/>
           </a:p>
@@ -2378,7 +2384,7 @@
           <a:p>
             <a:fld id="{DAA78FAB-1EC3-40C8-ADD3-266788085FA0}" type="datetimeFigureOut">
               <a:rPr lang="hu-HU" smtClean="0"/>
-              <a:t>2026. 09. 15.</a:t>
+              <a:t>2026. 09. 18.</a:t>
             </a:fld>
             <a:endParaRPr lang="hu-HU"/>
           </a:p>
@@ -2666,7 +2672,7 @@
           <a:p>
             <a:fld id="{DAA78FAB-1EC3-40C8-ADD3-266788085FA0}" type="datetimeFigureOut">
               <a:rPr lang="hu-HU" smtClean="0"/>
-              <a:t>2026. 09. 15.</a:t>
+              <a:t>2026. 09. 18.</a:t>
             </a:fld>
             <a:endParaRPr lang="hu-HU"/>
           </a:p>
@@ -2907,7 +2913,7 @@
           <a:p>
             <a:fld id="{DAA78FAB-1EC3-40C8-ADD3-266788085FA0}" type="datetimeFigureOut">
               <a:rPr lang="hu-HU" smtClean="0"/>
-              <a:t>2026. 09. 15.</a:t>
+              <a:t>2026. 09. 18.</a:t>
             </a:fld>
             <a:endParaRPr lang="hu-HU"/>
           </a:p>
@@ -3676,6 +3682,14 @@
 <file path=ppt/slides/slide3.xml><?xml version="1.0" encoding="utf-8"?>
 <p:sld xmlns:a="http://schemas.openxmlformats.org/drawingml/2006/main" xmlns:r="http://schemas.openxmlformats.org/officeDocument/2006/relationships" xmlns:p="http://schemas.openxmlformats.org/presentationml/2006/main">
   <p:cSld>
+    <p:bg>
+      <p:bgPr>
+        <a:solidFill>
+          <a:schemeClr val="tx1"/>
+        </a:solidFill>
+        <a:effectLst/>
+      </p:bgPr>
+    </p:bg>
     <p:spTree>
       <p:nvGrpSpPr>
         <p:cNvPr id="1" name=""/>
@@ -3692,6 +3706,226 @@
       </p:grpSpPr>
       <p:sp>
         <p:nvSpPr>
+          <p:cNvPr id="31" name="Téglalap: lekerekített 30">
+            <a:extLst>
+              <a:ext uri="{FF2B5EF4-FFF2-40B4-BE49-F238E27FC236}">
+                <a16:creationId xmlns:a16="http://schemas.microsoft.com/office/drawing/2014/main" id="{7C4544C5-5A43-46CB-B2C7-1E116F997894}"/>
+              </a:ext>
+            </a:extLst>
+          </p:cNvPr>
+          <p:cNvSpPr/>
+          <p:nvPr/>
+        </p:nvSpPr>
+        <p:spPr>
+          <a:xfrm>
+            <a:off x="8011039" y="2103436"/>
+            <a:ext cx="3570659" cy="3450408"/>
+          </a:xfrm>
+          <a:prstGeom prst="roundRect">
+            <a:avLst/>
+          </a:prstGeom>
+          <a:solidFill>
+            <a:schemeClr val="bg1"/>
+          </a:solidFill>
+        </p:spPr>
+        <p:style>
+          <a:lnRef idx="2">
+            <a:schemeClr val="accent1">
+              <a:shade val="50000"/>
+            </a:schemeClr>
+          </a:lnRef>
+          <a:fillRef idx="1">
+            <a:schemeClr val="accent1"/>
+          </a:fillRef>
+          <a:effectRef idx="0">
+            <a:schemeClr val="accent1"/>
+          </a:effectRef>
+          <a:fontRef idx="minor">
+            <a:schemeClr val="lt1"/>
+          </a:fontRef>
+        </p:style>
+        <p:txBody>
+          <a:bodyPr rtlCol="0" anchor="ctr"/>
+          <a:lstStyle/>
+          <a:p>
+            <a:pPr marL="285750" indent="-285750" algn="ctr">
+              <a:buFont typeface="Arial" panose="020B0604020202020204" pitchFamily="34" charset="0"/>
+              <a:buChar char="•"/>
+            </a:pPr>
+            <a:r>
+              <a:rPr lang="hu-HU" dirty="0">
+                <a:solidFill>
+                  <a:schemeClr val="tx1"/>
+                </a:solidFill>
+              </a:rPr>
+              <a:t>A lefutás végén a program kiírja a megyében élők számát.</a:t>
+            </a:r>
+          </a:p>
+          <a:p>
+            <a:pPr algn="ctr"/>
+            <a:r>
+              <a:rPr lang="hu-HU" dirty="0">
+                <a:solidFill>
+                  <a:schemeClr val="tx1"/>
+                </a:solidFill>
+              </a:rPr>
+              <a:t>Kiírja a megye városainak számát és a megye városaiban élők számát.</a:t>
+            </a:r>
+            <a:endParaRPr lang="hu-HU" dirty="0"/>
+          </a:p>
+        </p:txBody>
+      </p:sp>
+      <p:sp>
+        <p:nvSpPr>
+          <p:cNvPr id="30" name="Téglalap: lekerekített 29">
+            <a:extLst>
+              <a:ext uri="{FF2B5EF4-FFF2-40B4-BE49-F238E27FC236}">
+                <a16:creationId xmlns:a16="http://schemas.microsoft.com/office/drawing/2014/main" id="{C6C45C0E-A42D-4572-9669-C0417443862C}"/>
+              </a:ext>
+            </a:extLst>
+          </p:cNvPr>
+          <p:cNvSpPr/>
+          <p:nvPr/>
+        </p:nvSpPr>
+        <p:spPr>
+          <a:xfrm>
+            <a:off x="3995915" y="2103436"/>
+            <a:ext cx="3570660" cy="3450408"/>
+          </a:xfrm>
+          <a:prstGeom prst="roundRect">
+            <a:avLst/>
+          </a:prstGeom>
+          <a:solidFill>
+            <a:schemeClr val="bg1"/>
+          </a:solidFill>
+        </p:spPr>
+        <p:style>
+          <a:lnRef idx="2">
+            <a:schemeClr val="accent1">
+              <a:shade val="50000"/>
+            </a:schemeClr>
+          </a:lnRef>
+          <a:fillRef idx="1">
+            <a:schemeClr val="accent1"/>
+          </a:fillRef>
+          <a:effectRef idx="0">
+            <a:schemeClr val="accent1"/>
+          </a:effectRef>
+          <a:fontRef idx="minor">
+            <a:schemeClr val="lt1"/>
+          </a:fontRef>
+        </p:style>
+        <p:txBody>
+          <a:bodyPr rtlCol="0" anchor="ctr"/>
+          <a:lstStyle/>
+          <a:p>
+            <a:pPr algn="ctr"/>
+            <a:endParaRPr lang="hu-HU" dirty="0"/>
+          </a:p>
+        </p:txBody>
+      </p:sp>
+      <p:sp>
+        <p:nvSpPr>
+          <p:cNvPr id="29" name="Téglalap: lekerekített 28">
+            <a:extLst>
+              <a:ext uri="{FF2B5EF4-FFF2-40B4-BE49-F238E27FC236}">
+                <a16:creationId xmlns:a16="http://schemas.microsoft.com/office/drawing/2014/main" id="{8AA8D7B7-ED67-499A-8DE7-BD556B43BCD0}"/>
+              </a:ext>
+            </a:extLst>
+          </p:cNvPr>
+          <p:cNvSpPr/>
+          <p:nvPr/>
+        </p:nvSpPr>
+        <p:spPr>
+          <a:xfrm>
+            <a:off x="3995915" y="2103436"/>
+            <a:ext cx="3570660" cy="3450408"/>
+          </a:xfrm>
+          <a:prstGeom prst="roundRect">
+            <a:avLst/>
+          </a:prstGeom>
+          <a:solidFill>
+            <a:schemeClr val="bg1"/>
+          </a:solidFill>
+        </p:spPr>
+        <p:style>
+          <a:lnRef idx="2">
+            <a:schemeClr val="accent1">
+              <a:shade val="50000"/>
+            </a:schemeClr>
+          </a:lnRef>
+          <a:fillRef idx="1">
+            <a:schemeClr val="accent1"/>
+          </a:fillRef>
+          <a:effectRef idx="0">
+            <a:schemeClr val="accent1"/>
+          </a:effectRef>
+          <a:fontRef idx="minor">
+            <a:schemeClr val="lt1"/>
+          </a:fontRef>
+        </p:style>
+        <p:txBody>
+          <a:bodyPr rtlCol="0" anchor="ctr"/>
+          <a:lstStyle/>
+          <a:p>
+            <a:pPr algn="ctr"/>
+            <a:endParaRPr lang="hu-HU"/>
+          </a:p>
+        </p:txBody>
+      </p:sp>
+      <p:sp>
+        <p:nvSpPr>
+          <p:cNvPr id="14" name="Téglalap: lekerekített 13">
+            <a:extLst>
+              <a:ext uri="{FF2B5EF4-FFF2-40B4-BE49-F238E27FC236}">
+                <a16:creationId xmlns:a16="http://schemas.microsoft.com/office/drawing/2014/main" id="{F6CDC7B4-F32F-4297-A90E-2D9F38BE1ACC}"/>
+              </a:ext>
+            </a:extLst>
+          </p:cNvPr>
+          <p:cNvSpPr/>
+          <p:nvPr/>
+        </p:nvSpPr>
+        <p:spPr>
+          <a:xfrm>
+            <a:off x="0" y="2103436"/>
+            <a:ext cx="3570660" cy="3450408"/>
+          </a:xfrm>
+          <a:prstGeom prst="roundRect">
+            <a:avLst/>
+          </a:prstGeom>
+          <a:solidFill>
+            <a:schemeClr val="bg1">
+              <a:lumMod val="95000"/>
+            </a:schemeClr>
+          </a:solidFill>
+        </p:spPr>
+        <p:style>
+          <a:lnRef idx="2">
+            <a:schemeClr val="accent1">
+              <a:shade val="50000"/>
+            </a:schemeClr>
+          </a:lnRef>
+          <a:fillRef idx="1">
+            <a:schemeClr val="accent1"/>
+          </a:fillRef>
+          <a:effectRef idx="0">
+            <a:schemeClr val="accent1"/>
+          </a:effectRef>
+          <a:fontRef idx="minor">
+            <a:schemeClr val="lt1"/>
+          </a:fontRef>
+        </p:style>
+        <p:txBody>
+          <a:bodyPr rtlCol="0" anchor="ctr"/>
+          <a:lstStyle/>
+          <a:p>
+            <a:pPr algn="ctr"/>
+            <a:endParaRPr lang="hu-HU" dirty="0"/>
+          </a:p>
+        </p:txBody>
+      </p:sp>
+      <p:sp>
+        <p:nvSpPr>
           <p:cNvPr id="2" name="Cím 1">
             <a:extLst>
               <a:ext uri="{FF2B5EF4-FFF2-40B4-BE49-F238E27FC236}">
@@ -3706,40 +3940,155 @@
             <p:ph type="title"/>
           </p:nvPr>
         </p:nvSpPr>
-        <p:spPr/>
-        <p:txBody>
-          <a:bodyPr/>
-          <a:lstStyle/>
-          <a:p>
+        <p:spPr>
+          <a:xfrm>
+            <a:off x="4522158" y="91985"/>
+            <a:ext cx="3234267" cy="1325563"/>
+          </a:xfrm>
+        </p:spPr>
+        <p:txBody>
+          <a:bodyPr/>
+          <a:lstStyle/>
+          <a:p>
+            <a:r>
+              <a:rPr lang="hu-HU" dirty="0">
+                <a:solidFill>
+                  <a:schemeClr val="bg1"/>
+                </a:solidFill>
+              </a:rPr>
+              <a:t>Megye adatai</a:t>
+            </a:r>
+          </a:p>
+        </p:txBody>
+      </p:sp>
+      <p:sp>
+        <p:nvSpPr>
+          <p:cNvPr id="3" name="Tartalom helye 2">
+            <a:extLst>
+              <a:ext uri="{FF2B5EF4-FFF2-40B4-BE49-F238E27FC236}">
+                <a16:creationId xmlns:a16="http://schemas.microsoft.com/office/drawing/2014/main" id="{D3C9CC84-E556-405F-B9C2-842EBCAB4CF1}"/>
+              </a:ext>
+            </a:extLst>
+          </p:cNvPr>
+          <p:cNvSpPr>
+            <a:spLocks noGrp="1"/>
+          </p:cNvSpPr>
+          <p:nvPr>
+            <p:ph idx="1"/>
+          </p:nvPr>
+        </p:nvSpPr>
+        <p:spPr>
+          <a:xfrm>
+            <a:off x="108058" y="2400550"/>
+            <a:ext cx="3354543" cy="1028450"/>
+          </a:xfrm>
+        </p:spPr>
+        <p:txBody>
+          <a:bodyPr>
+            <a:noAutofit/>
+          </a:bodyPr>
+          <a:lstStyle/>
+          <a:p>
+            <a:r>
+              <a:rPr lang="hu-HU" sz="1800" dirty="0"/>
+              <a:t>Ha a főmenüben az 1-est választjuk akkor a program bekér tőlünk egy megyeazonosítót</a:t>
+            </a:r>
+          </a:p>
+        </p:txBody>
+      </p:sp>
+      <p:sp>
+        <p:nvSpPr>
+          <p:cNvPr id="6" name="Szövegdoboz 5">
+            <a:extLst>
+              <a:ext uri="{FF2B5EF4-FFF2-40B4-BE49-F238E27FC236}">
+                <a16:creationId xmlns:a16="http://schemas.microsoft.com/office/drawing/2014/main" id="{5DB183FF-7D7D-453A-8992-6214F16ECB37}"/>
+              </a:ext>
+            </a:extLst>
+          </p:cNvPr>
+          <p:cNvSpPr txBox="1"/>
+          <p:nvPr/>
+        </p:nvSpPr>
+        <p:spPr>
+          <a:xfrm>
+            <a:off x="3995915" y="2397479"/>
+            <a:ext cx="3589869" cy="2862322"/>
+          </a:xfrm>
+          <a:prstGeom prst="rect">
+            <a:avLst/>
+          </a:prstGeom>
+          <a:noFill/>
+        </p:spPr>
+        <p:txBody>
+          <a:bodyPr wrap="square" rtlCol="0">
+            <a:spAutoFit/>
+          </a:bodyPr>
+          <a:lstStyle/>
+          <a:p>
+            <a:pPr marL="285750" indent="-285750">
+              <a:buFont typeface="Arial" panose="020B0604020202020204" pitchFamily="34" charset="0"/>
+              <a:buChar char="•"/>
+            </a:pPr>
             <a:r>
               <a:rPr lang="hu-HU" dirty="0"/>
-              <a:t>Megye adatai</a:t>
-            </a:r>
-          </a:p>
-        </p:txBody>
-      </p:sp>
-      <p:sp>
-        <p:nvSpPr>
-          <p:cNvPr id="3" name="Tartalom helye 2">
-            <a:extLst>
-              <a:ext uri="{FF2B5EF4-FFF2-40B4-BE49-F238E27FC236}">
-                <a16:creationId xmlns:a16="http://schemas.microsoft.com/office/drawing/2014/main" id="{D3C9CC84-E556-405F-B9C2-842EBCAB4CF1}"/>
-              </a:ext>
-            </a:extLst>
-          </p:cNvPr>
-          <p:cNvSpPr>
-            <a:spLocks noGrp="1"/>
-          </p:cNvSpPr>
-          <p:nvPr>
-            <p:ph idx="1"/>
-          </p:nvPr>
-        </p:nvSpPr>
-        <p:spPr/>
-        <p:txBody>
-          <a:bodyPr/>
-          <a:lstStyle/>
-          <a:p>
-            <a:endParaRPr lang="hu-HU"/>
+              <a:t>Amint beírtuk az általunk választott azonosítót, megnézi a program hogy valóban van-e ilyen. Majd elkezdi kiszámolni a megyében lévő települések számát, a megye teljes lakosságát és a megye városaiban élő lakosainak számát. Ha az azonosító nem található akkor a program megáll.</a:t>
+            </a:r>
+          </a:p>
+        </p:txBody>
+      </p:sp>
+      <p:sp>
+        <p:nvSpPr>
+          <p:cNvPr id="21" name="Téglalap: lekerekített 20">
+            <a:hlinkClick r:id="rId2" action="ppaction://hlinksldjump"/>
+            <a:extLst>
+              <a:ext uri="{FF2B5EF4-FFF2-40B4-BE49-F238E27FC236}">
+                <a16:creationId xmlns:a16="http://schemas.microsoft.com/office/drawing/2014/main" id="{5180A07C-833A-4AF5-8286-885F978D86E1}"/>
+              </a:ext>
+            </a:extLst>
+          </p:cNvPr>
+          <p:cNvSpPr/>
+          <p:nvPr/>
+        </p:nvSpPr>
+        <p:spPr>
+          <a:xfrm>
+            <a:off x="9624767" y="316029"/>
+            <a:ext cx="2337847" cy="730346"/>
+          </a:xfrm>
+          <a:prstGeom prst="roundRect">
+            <a:avLst/>
+          </a:prstGeom>
+          <a:solidFill>
+            <a:srgbClr val="FF0000"/>
+          </a:solidFill>
+        </p:spPr>
+        <p:style>
+          <a:lnRef idx="2">
+            <a:schemeClr val="accent1">
+              <a:shade val="50000"/>
+            </a:schemeClr>
+          </a:lnRef>
+          <a:fillRef idx="1">
+            <a:schemeClr val="accent1"/>
+          </a:fillRef>
+          <a:effectRef idx="0">
+            <a:schemeClr val="accent1"/>
+          </a:effectRef>
+          <a:fontRef idx="minor">
+            <a:schemeClr val="lt1"/>
+          </a:fontRef>
+        </p:style>
+        <p:txBody>
+          <a:bodyPr rtlCol="0" anchor="ctr"/>
+          <a:lstStyle/>
+          <a:p>
+            <a:pPr algn="ctr"/>
+            <a:r>
+              <a:rPr lang="hu-HU" sz="4400" dirty="0">
+                <a:solidFill>
+                  <a:schemeClr val="tx1"/>
+                </a:solidFill>
+              </a:rPr>
+              <a:t>Vissza</a:t>
+            </a:r>
           </a:p>
         </p:txBody>
       </p:sp>
@@ -3759,6 +4108,14 @@
 <file path=ppt/slides/slide4.xml><?xml version="1.0" encoding="utf-8"?>
 <p:sld xmlns:a="http://schemas.openxmlformats.org/drawingml/2006/main" xmlns:r="http://schemas.openxmlformats.org/officeDocument/2006/relationships" xmlns:p="http://schemas.openxmlformats.org/presentationml/2006/main">
   <p:cSld>
+    <p:bg>
+      <p:bgPr>
+        <a:solidFill>
+          <a:schemeClr val="tx1"/>
+        </a:solidFill>
+        <a:effectLst/>
+      </p:bgPr>
+    </p:bg>
     <p:spTree>
       <p:nvGrpSpPr>
         <p:cNvPr id="1" name=""/>
@@ -3775,6 +4132,112 @@
       </p:grpSpPr>
       <p:sp>
         <p:nvSpPr>
+          <p:cNvPr id="8" name="Téglalap: lekerekített 7">
+            <a:hlinkClick r:id="rId2" action="ppaction://hlinksldjump"/>
+            <a:extLst>
+              <a:ext uri="{FF2B5EF4-FFF2-40B4-BE49-F238E27FC236}">
+                <a16:creationId xmlns:a16="http://schemas.microsoft.com/office/drawing/2014/main" id="{EA67D50F-EC2F-437B-8CFE-0CB9018C4E25}"/>
+              </a:ext>
+            </a:extLst>
+          </p:cNvPr>
+          <p:cNvSpPr/>
+          <p:nvPr/>
+        </p:nvSpPr>
+        <p:spPr>
+          <a:xfrm>
+            <a:off x="9609666" y="104231"/>
+            <a:ext cx="2336800" cy="872066"/>
+          </a:xfrm>
+          <a:prstGeom prst="roundRect">
+            <a:avLst/>
+          </a:prstGeom>
+          <a:solidFill>
+            <a:srgbClr val="FF0000"/>
+          </a:solidFill>
+        </p:spPr>
+        <p:style>
+          <a:lnRef idx="2">
+            <a:schemeClr val="accent1">
+              <a:shade val="50000"/>
+            </a:schemeClr>
+          </a:lnRef>
+          <a:fillRef idx="1">
+            <a:schemeClr val="accent1"/>
+          </a:fillRef>
+          <a:effectRef idx="0">
+            <a:schemeClr val="accent1"/>
+          </a:effectRef>
+          <a:fontRef idx="minor">
+            <a:schemeClr val="lt1"/>
+          </a:fontRef>
+        </p:style>
+        <p:txBody>
+          <a:bodyPr rtlCol="0" anchor="ctr"/>
+          <a:lstStyle/>
+          <a:p>
+            <a:pPr algn="ctr"/>
+            <a:r>
+              <a:rPr lang="hu-HU" sz="4400" dirty="0">
+                <a:solidFill>
+                  <a:schemeClr val="tx1"/>
+                </a:solidFill>
+              </a:rPr>
+              <a:t>Vissza</a:t>
+            </a:r>
+          </a:p>
+        </p:txBody>
+      </p:sp>
+      <p:sp>
+        <p:nvSpPr>
+          <p:cNvPr id="4" name="Téglalap: lekerekített 3">
+            <a:extLst>
+              <a:ext uri="{FF2B5EF4-FFF2-40B4-BE49-F238E27FC236}">
+                <a16:creationId xmlns:a16="http://schemas.microsoft.com/office/drawing/2014/main" id="{7FF0514F-080E-4CA1-A561-08354E44E024}"/>
+              </a:ext>
+            </a:extLst>
+          </p:cNvPr>
+          <p:cNvSpPr/>
+          <p:nvPr/>
+        </p:nvSpPr>
+        <p:spPr>
+          <a:xfrm>
+            <a:off x="230565" y="1539859"/>
+            <a:ext cx="3582184" cy="4091233"/>
+          </a:xfrm>
+          <a:prstGeom prst="roundRect">
+            <a:avLst/>
+          </a:prstGeom>
+          <a:solidFill>
+            <a:schemeClr val="bg1"/>
+          </a:solidFill>
+        </p:spPr>
+        <p:style>
+          <a:lnRef idx="2">
+            <a:schemeClr val="accent1">
+              <a:shade val="50000"/>
+            </a:schemeClr>
+          </a:lnRef>
+          <a:fillRef idx="1">
+            <a:schemeClr val="accent1"/>
+          </a:fillRef>
+          <a:effectRef idx="0">
+            <a:schemeClr val="accent1"/>
+          </a:effectRef>
+          <a:fontRef idx="minor">
+            <a:schemeClr val="lt1"/>
+          </a:fontRef>
+        </p:style>
+        <p:txBody>
+          <a:bodyPr rtlCol="0" anchor="ctr"/>
+          <a:lstStyle/>
+          <a:p>
+            <a:pPr algn="ctr"/>
+            <a:endParaRPr lang="hu-HU"/>
+          </a:p>
+        </p:txBody>
+      </p:sp>
+      <p:sp>
+        <p:nvSpPr>
           <p:cNvPr id="2" name="Cím 1">
             <a:extLst>
               <a:ext uri="{FF2B5EF4-FFF2-40B4-BE49-F238E27FC236}">
@@ -3789,40 +4252,239 @@
             <p:ph type="title"/>
           </p:nvPr>
         </p:nvSpPr>
-        <p:spPr/>
-        <p:txBody>
-          <a:bodyPr/>
-          <a:lstStyle/>
-          <a:p>
+        <p:spPr>
+          <a:xfrm>
+            <a:off x="4021707" y="104231"/>
+            <a:ext cx="4073165" cy="1325563"/>
+          </a:xfrm>
+        </p:spPr>
+        <p:txBody>
+          <a:bodyPr/>
+          <a:lstStyle/>
+          <a:p>
+            <a:r>
+              <a:rPr lang="hu-HU" dirty="0">
+                <a:solidFill>
+                  <a:schemeClr val="bg1"/>
+                </a:solidFill>
+              </a:rPr>
+              <a:t>Település adatai</a:t>
+            </a:r>
+          </a:p>
+        </p:txBody>
+      </p:sp>
+      <p:sp>
+        <p:nvSpPr>
+          <p:cNvPr id="3" name="Tartalom helye 2">
+            <a:extLst>
+              <a:ext uri="{FF2B5EF4-FFF2-40B4-BE49-F238E27FC236}">
+                <a16:creationId xmlns:a16="http://schemas.microsoft.com/office/drawing/2014/main" id="{9248EAA3-75F8-474C-BF00-447CEBA10C2D}"/>
+              </a:ext>
+            </a:extLst>
+          </p:cNvPr>
+          <p:cNvSpPr>
+            <a:spLocks noGrp="1"/>
+          </p:cNvSpPr>
+          <p:nvPr>
+            <p:ph idx="1"/>
+          </p:nvPr>
+        </p:nvSpPr>
+        <p:spPr>
+          <a:xfrm>
+            <a:off x="475269" y="1891612"/>
+            <a:ext cx="3092777" cy="1068404"/>
+          </a:xfrm>
+        </p:spPr>
+        <p:txBody>
+          <a:bodyPr>
+            <a:normAutofit/>
+          </a:bodyPr>
+          <a:lstStyle/>
+          <a:p>
+            <a:r>
+              <a:rPr lang="hu-HU" sz="1800" dirty="0"/>
+              <a:t>Ha a 2es-t választjuk akkor a program bekér egy település típust.</a:t>
+            </a:r>
+          </a:p>
+        </p:txBody>
+      </p:sp>
+      <p:sp>
+        <p:nvSpPr>
+          <p:cNvPr id="6" name="Téglalap: lekerekített 5">
+            <a:extLst>
+              <a:ext uri="{FF2B5EF4-FFF2-40B4-BE49-F238E27FC236}">
+                <a16:creationId xmlns:a16="http://schemas.microsoft.com/office/drawing/2014/main" id="{6FAC173C-2CC3-4959-A48E-2AA4BFDA1337}"/>
+              </a:ext>
+            </a:extLst>
+          </p:cNvPr>
+          <p:cNvSpPr/>
+          <p:nvPr/>
+        </p:nvSpPr>
+        <p:spPr>
+          <a:xfrm>
+            <a:off x="4267199" y="1539858"/>
+            <a:ext cx="3582183" cy="4091233"/>
+          </a:xfrm>
+          <a:prstGeom prst="roundRect">
+            <a:avLst/>
+          </a:prstGeom>
+          <a:solidFill>
+            <a:schemeClr val="bg1"/>
+          </a:solidFill>
+        </p:spPr>
+        <p:style>
+          <a:lnRef idx="2">
+            <a:schemeClr val="accent1">
+              <a:shade val="50000"/>
+            </a:schemeClr>
+          </a:lnRef>
+          <a:fillRef idx="1">
+            <a:schemeClr val="accent1"/>
+          </a:fillRef>
+          <a:effectRef idx="0">
+            <a:schemeClr val="accent1"/>
+          </a:effectRef>
+          <a:fontRef idx="minor">
+            <a:schemeClr val="lt1"/>
+          </a:fontRef>
+        </p:style>
+        <p:txBody>
+          <a:bodyPr rtlCol="0" anchor="ctr"/>
+          <a:lstStyle/>
+          <a:p>
+            <a:pPr algn="ctr"/>
+            <a:endParaRPr lang="hu-HU" dirty="0"/>
+          </a:p>
+        </p:txBody>
+      </p:sp>
+      <p:sp>
+        <p:nvSpPr>
+          <p:cNvPr id="7" name="Szövegdoboz 6">
+            <a:extLst>
+              <a:ext uri="{FF2B5EF4-FFF2-40B4-BE49-F238E27FC236}">
+                <a16:creationId xmlns:a16="http://schemas.microsoft.com/office/drawing/2014/main" id="{F6CF3470-DC73-49DD-8E99-DFA3A393C642}"/>
+              </a:ext>
+            </a:extLst>
+          </p:cNvPr>
+          <p:cNvSpPr txBox="1"/>
+          <p:nvPr/>
+        </p:nvSpPr>
+        <p:spPr>
+          <a:xfrm>
+            <a:off x="4504265" y="1891612"/>
+            <a:ext cx="3048001" cy="923330"/>
+          </a:xfrm>
+          <a:prstGeom prst="rect">
+            <a:avLst/>
+          </a:prstGeom>
+          <a:noFill/>
+        </p:spPr>
+        <p:txBody>
+          <a:bodyPr wrap="square" rtlCol="0">
+            <a:spAutoFit/>
+          </a:bodyPr>
+          <a:lstStyle/>
+          <a:p>
+            <a:pPr marL="285750" indent="-285750">
+              <a:buFont typeface="Arial" panose="020B0604020202020204" pitchFamily="34" charset="0"/>
+              <a:buChar char="•"/>
+            </a:pPr>
             <a:r>
               <a:rPr lang="hu-HU" dirty="0"/>
-              <a:t>Település adatai</a:t>
-            </a:r>
-          </a:p>
-        </p:txBody>
-      </p:sp>
-      <p:sp>
-        <p:nvSpPr>
-          <p:cNvPr id="3" name="Tartalom helye 2">
-            <a:extLst>
-              <a:ext uri="{FF2B5EF4-FFF2-40B4-BE49-F238E27FC236}">
-                <a16:creationId xmlns:a16="http://schemas.microsoft.com/office/drawing/2014/main" id="{9248EAA3-75F8-474C-BF00-447CEBA10C2D}"/>
-              </a:ext>
-            </a:extLst>
-          </p:cNvPr>
-          <p:cNvSpPr>
-            <a:spLocks noGrp="1"/>
-          </p:cNvSpPr>
-          <p:nvPr>
-            <p:ph idx="1"/>
-          </p:nvPr>
-        </p:nvSpPr>
-        <p:spPr/>
-        <p:txBody>
-          <a:bodyPr/>
-          <a:lstStyle/>
-          <a:p>
+              <a:t>Ezután a program összeszámolja hány ilyen típusú </a:t>
+            </a:r>
+            <a:r>
+              <a:rPr lang="hu-HU" dirty="0" err="1"/>
+              <a:t>telpülés</a:t>
+            </a:r>
+            <a:r>
+              <a:rPr lang="hu-HU" dirty="0"/>
+              <a:t> van és kiírja</a:t>
+            </a:r>
+          </a:p>
+        </p:txBody>
+      </p:sp>
+      <p:sp>
+        <p:nvSpPr>
+          <p:cNvPr id="9" name="Téglalap: lekerekített 8">
+            <a:extLst>
+              <a:ext uri="{FF2B5EF4-FFF2-40B4-BE49-F238E27FC236}">
+                <a16:creationId xmlns:a16="http://schemas.microsoft.com/office/drawing/2014/main" id="{B29CB51B-8709-42C2-B095-16649CED83A6}"/>
+              </a:ext>
+            </a:extLst>
+          </p:cNvPr>
+          <p:cNvSpPr/>
+          <p:nvPr/>
+        </p:nvSpPr>
+        <p:spPr>
+          <a:xfrm>
+            <a:off x="8303832" y="1539857"/>
+            <a:ext cx="3582183" cy="4091233"/>
+          </a:xfrm>
+          <a:prstGeom prst="roundRect">
+            <a:avLst/>
+          </a:prstGeom>
+          <a:solidFill>
+            <a:schemeClr val="bg1"/>
+          </a:solidFill>
+        </p:spPr>
+        <p:style>
+          <a:lnRef idx="2">
+            <a:schemeClr val="accent1">
+              <a:shade val="50000"/>
+            </a:schemeClr>
+          </a:lnRef>
+          <a:fillRef idx="1">
+            <a:schemeClr val="accent1"/>
+          </a:fillRef>
+          <a:effectRef idx="0">
+            <a:schemeClr val="accent1"/>
+          </a:effectRef>
+          <a:fontRef idx="minor">
+            <a:schemeClr val="lt1"/>
+          </a:fontRef>
+        </p:style>
+        <p:txBody>
+          <a:bodyPr rtlCol="0" anchor="ctr"/>
+          <a:lstStyle/>
+          <a:p>
+            <a:pPr algn="ctr"/>
             <a:endParaRPr lang="hu-HU"/>
+          </a:p>
+        </p:txBody>
+      </p:sp>
+      <p:sp>
+        <p:nvSpPr>
+          <p:cNvPr id="10" name="Szövegdoboz 9">
+            <a:extLst>
+              <a:ext uri="{FF2B5EF4-FFF2-40B4-BE49-F238E27FC236}">
+                <a16:creationId xmlns:a16="http://schemas.microsoft.com/office/drawing/2014/main" id="{DD802F8E-6139-434F-A5E4-94AE59336A20}"/>
+              </a:ext>
+            </a:extLst>
+          </p:cNvPr>
+          <p:cNvSpPr txBox="1"/>
+          <p:nvPr/>
+        </p:nvSpPr>
+        <p:spPr>
+          <a:xfrm>
+            <a:off x="8687339" y="1891612"/>
+            <a:ext cx="2815167" cy="923330"/>
+          </a:xfrm>
+          <a:prstGeom prst="rect">
+            <a:avLst/>
+          </a:prstGeom>
+          <a:noFill/>
+        </p:spPr>
+        <p:txBody>
+          <a:bodyPr wrap="square" rtlCol="0">
+            <a:spAutoFit/>
+          </a:bodyPr>
+          <a:lstStyle/>
+          <a:p>
+            <a:r>
+              <a:rPr lang="hu-HU" dirty="0"/>
+              <a:t>Majd kiírja a települések neveit és a települések lakosainak számát</a:t>
+            </a:r>
           </a:p>
         </p:txBody>
       </p:sp>
@@ -3830,6 +4492,118 @@
     <p:extLst>
       <p:ext uri="{BB962C8B-B14F-4D97-AF65-F5344CB8AC3E}">
         <p14:creationId xmlns:p14="http://schemas.microsoft.com/office/powerpoint/2010/main" val="4125865230"/>
+      </p:ext>
+    </p:extLst>
+  </p:cSld>
+  <p:clrMapOvr>
+    <a:masterClrMapping/>
+  </p:clrMapOvr>
+</p:sld>
+</file>
+
+<file path=ppt/slides/slide5.xml><?xml version="1.0" encoding="utf-8"?>
+<p:sld xmlns:a="http://schemas.openxmlformats.org/drawingml/2006/main" xmlns:r="http://schemas.openxmlformats.org/officeDocument/2006/relationships" xmlns:p="http://schemas.openxmlformats.org/presentationml/2006/main">
+  <p:cSld>
+    <p:bg>
+      <p:bgPr>
+        <a:blipFill dpi="0" rotWithShape="1">
+          <a:blip r:embed="rId2">
+            <a:lum/>
+          </a:blip>
+          <a:srcRect/>
+          <a:stretch>
+            <a:fillRect l="-6000" r="-6000"/>
+          </a:stretch>
+        </a:blipFill>
+        <a:effectLst/>
+      </p:bgPr>
+    </p:bg>
+    <p:spTree>
+      <p:nvGrpSpPr>
+        <p:cNvPr id="1" name=""/>
+        <p:cNvGrpSpPr/>
+        <p:nvPr/>
+      </p:nvGrpSpPr>
+      <p:grpSpPr>
+        <a:xfrm>
+          <a:off x="0" y="0"/>
+          <a:ext cx="0" cy="0"/>
+          <a:chOff x="0" y="0"/>
+          <a:chExt cx="0" cy="0"/>
+        </a:xfrm>
+      </p:grpSpPr>
+      <p:sp>
+        <p:nvSpPr>
+          <p:cNvPr id="2" name="Cím 1">
+            <a:extLst>
+              <a:ext uri="{FF2B5EF4-FFF2-40B4-BE49-F238E27FC236}">
+                <a16:creationId xmlns:a16="http://schemas.microsoft.com/office/drawing/2014/main" id="{7C785177-12DF-45D9-8C3B-F79788D33BFE}"/>
+              </a:ext>
+            </a:extLst>
+          </p:cNvPr>
+          <p:cNvSpPr>
+            <a:spLocks noGrp="1"/>
+          </p:cNvSpPr>
+          <p:nvPr>
+            <p:ph type="title"/>
+          </p:nvPr>
+        </p:nvSpPr>
+        <p:spPr>
+          <a:xfrm>
+            <a:off x="5412164" y="120028"/>
+            <a:ext cx="1367672" cy="1325563"/>
+          </a:xfrm>
+        </p:spPr>
+        <p:txBody>
+          <a:bodyPr/>
+          <a:lstStyle/>
+          <a:p>
+            <a:r>
+              <a:rPr lang="hu-HU" dirty="0"/>
+              <a:t>Vége</a:t>
+            </a:r>
+          </a:p>
+        </p:txBody>
+      </p:sp>
+      <p:sp>
+        <p:nvSpPr>
+          <p:cNvPr id="3" name="Tartalom helye 2">
+            <a:extLst>
+              <a:ext uri="{FF2B5EF4-FFF2-40B4-BE49-F238E27FC236}">
+                <a16:creationId xmlns:a16="http://schemas.microsoft.com/office/drawing/2014/main" id="{1D65F5AF-A766-4CF0-BCDA-4E926FDC6CCF}"/>
+              </a:ext>
+            </a:extLst>
+          </p:cNvPr>
+          <p:cNvSpPr>
+            <a:spLocks noGrp="1"/>
+          </p:cNvSpPr>
+          <p:nvPr>
+            <p:ph idx="1"/>
+          </p:nvPr>
+        </p:nvSpPr>
+        <p:spPr>
+          <a:xfrm>
+            <a:off x="2612402" y="2723805"/>
+            <a:ext cx="6967195" cy="1256941"/>
+          </a:xfrm>
+        </p:spPr>
+        <p:txBody>
+          <a:bodyPr>
+            <a:normAutofit/>
+          </a:bodyPr>
+          <a:lstStyle/>
+          <a:p>
+            <a:r>
+              <a:rPr lang="hu-HU" sz="5400" dirty="0"/>
+              <a:t>Köszönjük a figyelmet!!</a:t>
+            </a:r>
+          </a:p>
+        </p:txBody>
+      </p:sp>
+    </p:spTree>
+    <p:extLst>
+      <p:ext uri="{BB962C8B-B14F-4D97-AF65-F5344CB8AC3E}">
+        <p14:creationId xmlns:p14="http://schemas.microsoft.com/office/powerpoint/2010/main" val="890414470"/>
       </p:ext>
     </p:extLst>
   </p:cSld>
